--- a/Sugar_Trap_Presentation.pptx
+++ b/Sugar_Trap_Presentation.pptx
@@ -112,11 +112,6 @@
       </a:defRPr>
     </a:lvl9pPr>
   </p:defaultTextStyle>
-  <p:extLst>
-    <p:ext uri="{EFAFB233-063F-42B5-8137-9DF3F51BA10A}">
-      <p15:sldGuideLst xmlns:p15="http://schemas.microsoft.com/office/powerpoint/2012/main"/>
-    </p:ext>
-  </p:extLst>
 </p:presentation>
 </file>
 
@@ -159,12 +154,6 @@
             <c:idx val="0"/>
             <c:invertIfNegative val="0"/>
             <c:bubble3D val="0"/>
-            <c:spPr>
-              <a:solidFill>
-                <a:srgbClr val="0F6E56"/>
-              </a:solidFill>
-              <a:effectLst/>
-            </c:spPr>
             <c:extLst>
               <c:ext xmlns:c16="http://schemas.microsoft.com/office/drawing/2014/chart" uri="{C3380CC4-5D6E-409C-BE32-E72D297353CC}">
                 <c16:uniqueId val="{00000001-A755-4DF1-9830-F7B226CC67EF}"/>
@@ -715,12 +704,6 @@
             <c:idx val="0"/>
             <c:invertIfNegative val="0"/>
             <c:bubble3D val="0"/>
-            <c:spPr>
-              <a:solidFill>
-                <a:srgbClr val="E63946"/>
-              </a:solidFill>
-              <a:effectLst/>
-            </c:spPr>
             <c:extLst>
               <c:ext xmlns:c16="http://schemas.microsoft.com/office/drawing/2014/chart" uri="{C3380CC4-5D6E-409C-BE32-E72D297353CC}">
                 <c16:uniqueId val="{00000001-C5CD-44DC-91B0-5099BD173D9E}"/>
@@ -731,12 +714,6 @@
             <c:idx val="1"/>
             <c:invertIfNegative val="0"/>
             <c:bubble3D val="0"/>
-            <c:spPr>
-              <a:solidFill>
-                <a:srgbClr val="E63946"/>
-              </a:solidFill>
-              <a:effectLst/>
-            </c:spPr>
             <c:extLst>
               <c:ext xmlns:c16="http://schemas.microsoft.com/office/drawing/2014/chart" uri="{C3380CC4-5D6E-409C-BE32-E72D297353CC}">
                 <c16:uniqueId val="{00000003-C5CD-44DC-91B0-5099BD173D9E}"/>
@@ -747,12 +724,6 @@
             <c:idx val="2"/>
             <c:invertIfNegative val="0"/>
             <c:bubble3D val="0"/>
-            <c:spPr>
-              <a:solidFill>
-                <a:srgbClr val="E63946"/>
-              </a:solidFill>
-              <a:effectLst/>
-            </c:spPr>
             <c:extLst>
               <c:ext xmlns:c16="http://schemas.microsoft.com/office/drawing/2014/chart" uri="{C3380CC4-5D6E-409C-BE32-E72D297353CC}">
                 <c16:uniqueId val="{00000005-C5CD-44DC-91B0-5099BD173D9E}"/>
@@ -1291,7 +1262,7 @@
           <a:bodyPr/>
           <a:lstStyle/>
           <a:p>
-            <a:endParaRPr lang="en-US" dirty="0"/>
+            <a:endParaRPr lang="en-US"/>
           </a:p>
         </p:txBody>
       </p:sp>
@@ -1375,7 +1346,7 @@
           <a:bodyPr/>
           <a:lstStyle/>
           <a:p>
-            <a:endParaRPr lang="en-US" dirty="0"/>
+            <a:endParaRPr lang="en-US"/>
           </a:p>
         </p:txBody>
       </p:sp>
@@ -1459,7 +1430,7 @@
           <a:bodyPr/>
           <a:lstStyle/>
           <a:p>
-            <a:endParaRPr lang="en-US" dirty="0"/>
+            <a:endParaRPr lang="en-US"/>
           </a:p>
         </p:txBody>
       </p:sp>
@@ -1543,7 +1514,7 @@
           <a:bodyPr/>
           <a:lstStyle/>
           <a:p>
-            <a:endParaRPr lang="en-US" dirty="0"/>
+            <a:endParaRPr lang="en-US"/>
           </a:p>
         </p:txBody>
       </p:sp>
@@ -1627,7 +1598,7 @@
           <a:bodyPr/>
           <a:lstStyle/>
           <a:p>
-            <a:endParaRPr lang="en-US" dirty="0"/>
+            <a:endParaRPr lang="en-US"/>
           </a:p>
         </p:txBody>
       </p:sp>
@@ -1711,7 +1682,7 @@
           <a:bodyPr/>
           <a:lstStyle/>
           <a:p>
-            <a:endParaRPr lang="en-US" dirty="0"/>
+            <a:endParaRPr lang="en-US"/>
           </a:p>
         </p:txBody>
       </p:sp>
@@ -1795,7 +1766,7 @@
           <a:bodyPr/>
           <a:lstStyle/>
           <a:p>
-            <a:endParaRPr lang="en-US" dirty="0"/>
+            <a:endParaRPr lang="en-US"/>
           </a:p>
         </p:txBody>
       </p:sp>
@@ -1879,7 +1850,7 @@
           <a:bodyPr/>
           <a:lstStyle/>
           <a:p>
-            <a:endParaRPr lang="en-US" dirty="0"/>
+            <a:endParaRPr lang="en-US"/>
           </a:p>
         </p:txBody>
       </p:sp>
@@ -1963,7 +1934,7 @@
           <a:bodyPr/>
           <a:lstStyle/>
           <a:p>
-            <a:endParaRPr lang="en-US" dirty="0"/>
+            <a:endParaRPr lang="en-US"/>
           </a:p>
         </p:txBody>
       </p:sp>
@@ -2368,7 +2339,7 @@
           <a:bodyPr/>
           <a:lstStyle/>
           <a:p>
-            <a:endParaRPr lang="en-GH" dirty="0"/>
+            <a:endParaRPr lang="en-GH"/>
           </a:p>
         </p:txBody>
       </p:sp>
@@ -2429,7 +2400,7 @@
               <a:buNone/>
             </a:pPr>
             <a:r>
-              <a:rPr lang="en-US" sz="5200" b="1" dirty="0">
+              <a:rPr lang="en-US" sz="5200" b="1">
                 <a:solidFill>
                   <a:srgbClr val="FFFFFF"/>
                 </a:solidFill>
@@ -2439,7 +2410,7 @@
               </a:rPr>
               <a:t>THE SUGAR TRAP</a:t>
             </a:r>
-            <a:endParaRPr lang="en-US" sz="5200" dirty="0"/>
+            <a:endParaRPr lang="en-US" sz="5200"/>
           </a:p>
         </p:txBody>
       </p:sp>
@@ -2468,7 +2439,7 @@
               <a:buNone/>
             </a:pPr>
             <a:r>
-              <a:rPr lang="en-US" sz="2600" i="1" dirty="0">
+              <a:rPr lang="en-US" sz="2600" i="1">
                 <a:solidFill>
                   <a:srgbClr val="A8C8E8"/>
                 </a:solidFill>
@@ -2478,7 +2449,7 @@
               </a:rPr>
               <a:t>Market Gap Analysis</a:t>
             </a:r>
-            <a:endParaRPr lang="en-US" sz="2600" dirty="0"/>
+            <a:endParaRPr lang="en-US" sz="2600"/>
           </a:p>
         </p:txBody>
       </p:sp>
@@ -2507,7 +2478,7 @@
               <a:buNone/>
             </a:pPr>
             <a:r>
-              <a:rPr lang="en-US" sz="1600" dirty="0">
+              <a:rPr lang="en-US" sz="1600">
                 <a:solidFill>
                   <a:srgbClr val="7B9CC4"/>
                 </a:solidFill>
@@ -2517,7 +2488,7 @@
               </a:rPr>
               <a:t>Where is the Blue Ocean in the Snack Aisle?</a:t>
             </a:r>
-            <a:endParaRPr lang="en-US" sz="1600" dirty="0"/>
+            <a:endParaRPr lang="en-US" sz="1600"/>
           </a:p>
         </p:txBody>
       </p:sp>
@@ -2545,7 +2516,7 @@
             <a:pPr marL="0" indent="0" algn="ctr">
               <a:buNone/>
             </a:pPr>
-            <a:endParaRPr lang="en-US" sz="1100" dirty="0"/>
+            <a:endParaRPr lang="en-US" sz="1100"/>
           </a:p>
         </p:txBody>
       </p:sp>
@@ -2574,7 +2545,7 @@
               <a:buNone/>
             </a:pPr>
             <a:r>
-              <a:rPr lang="en-US" sz="1200" b="1" dirty="0">
+              <a:rPr lang="en-US" sz="1200" b="1">
                 <a:solidFill>
                   <a:srgbClr val="A8C8E8"/>
                 </a:solidFill>
@@ -2585,7 +2556,7 @@
               <a:t>Client: </a:t>
             </a:r>
             <a:r>
-              <a:rPr lang="en-US" sz="1200" dirty="0">
+              <a:rPr lang="en-US" sz="1200">
                 <a:solidFill>
                   <a:srgbClr val="FFFFFF"/>
                 </a:solidFill>
@@ -2596,7 +2567,7 @@
               <a:t>Helix CPG Partners</a:t>
             </a:r>
             <a:r>
-              <a:rPr lang="en-US" sz="1200" dirty="0">
+              <a:rPr lang="en-US" sz="1200">
                 <a:solidFill>
                   <a:srgbClr val="4A6FA5"/>
                 </a:solidFill>
@@ -2607,7 +2578,7 @@
               <a:t>   |   </a:t>
             </a:r>
             <a:r>
-              <a:rPr lang="en-US" sz="1200" b="1" dirty="0">
+              <a:rPr lang="en-US" sz="1200" b="1">
                 <a:solidFill>
                   <a:srgbClr val="A8C8E8"/>
                 </a:solidFill>
@@ -2618,7 +2589,7 @@
               <a:t>Dataset: </a:t>
             </a:r>
             <a:r>
-              <a:rPr lang="en-US" sz="1200" dirty="0">
+              <a:rPr lang="en-US" sz="1200">
                 <a:solidFill>
                   <a:srgbClr val="FFFFFF"/>
                 </a:solidFill>
@@ -2629,7 +2600,7 @@
               <a:t>Open Food Facts</a:t>
             </a:r>
             <a:r>
-              <a:rPr lang="en-US" sz="1200" dirty="0">
+              <a:rPr lang="en-US" sz="1200">
                 <a:solidFill>
                   <a:srgbClr val="4A6FA5"/>
                 </a:solidFill>
@@ -2640,7 +2611,7 @@
               <a:t>   |   </a:t>
             </a:r>
             <a:r>
-              <a:rPr lang="en-US" sz="1200" dirty="0">
+              <a:rPr lang="en-US" sz="1200">
                 <a:solidFill>
                   <a:srgbClr val="FFFFFF"/>
                 </a:solidFill>
@@ -2650,7 +2621,7 @@
               </a:rPr>
               <a:t>500,000 Products Analysed</a:t>
             </a:r>
-            <a:endParaRPr lang="en-US" sz="1200" dirty="0"/>
+            <a:endParaRPr lang="en-US" sz="1200"/>
           </a:p>
         </p:txBody>
       </p:sp>
@@ -2679,7 +2650,7 @@
               <a:buNone/>
             </a:pPr>
             <a:r>
-              <a:rPr lang="en-US" sz="1100" dirty="0">
+              <a:rPr lang="en-US" sz="1100">
                 <a:solidFill>
                   <a:srgbClr val="4A6FA5"/>
                 </a:solidFill>
@@ -2689,7 +2660,7 @@
               </a:rPr>
               <a:t>Analyst: Angela Tenkorang</a:t>
             </a:r>
-            <a:endParaRPr lang="en-US" sz="1100" dirty="0"/>
+            <a:endParaRPr lang="en-US" sz="1100"/>
           </a:p>
         </p:txBody>
       </p:sp>
@@ -2783,7 +2754,7 @@
               <a:buNone/>
             </a:pPr>
             <a:r>
-              <a:rPr lang="en-US" sz="2800" b="1" dirty="0">
+              <a:rPr lang="en-US" sz="2800" b="1">
                 <a:solidFill>
                   <a:srgbClr val="FFFFFF"/>
                 </a:solidFill>
@@ -2793,7 +2764,7 @@
               </a:rPr>
               <a:t>The Business Question</a:t>
             </a:r>
-            <a:endParaRPr lang="en-US" sz="2800" dirty="0"/>
+            <a:endParaRPr lang="en-US" sz="2800"/>
           </a:p>
         </p:txBody>
       </p:sp>
@@ -2854,7 +2825,7 @@
               <a:buNone/>
             </a:pPr>
             <a:r>
-              <a:rPr lang="en-US" sz="4000" b="1" dirty="0">
+              <a:rPr lang="en-US" sz="4000" b="1">
                 <a:solidFill>
                   <a:srgbClr val="2A9D8F"/>
                 </a:solidFill>
@@ -2865,7 +2836,7 @@
               <a:t>"</a:t>
             </a:r>
             <a:r>
-              <a:rPr lang="en-US" sz="2000" b="1" i="1" dirty="0">
+              <a:rPr lang="en-US" sz="2000" b="1" i="1">
                 <a:solidFill>
                   <a:srgbClr val="1F3864"/>
                 </a:solidFill>
@@ -2876,7 +2847,7 @@
               <a:t>Where is the Blue Ocean in the snack aisle?</a:t>
             </a:r>
             <a:r>
-              <a:rPr lang="en-US" sz="4000" b="1" dirty="0">
+              <a:rPr lang="en-US" sz="4000" b="1">
                 <a:solidFill>
                   <a:srgbClr val="2A9D8F"/>
                 </a:solidFill>
@@ -2886,7 +2857,7 @@
               </a:rPr>
               <a:t>"</a:t>
             </a:r>
-            <a:endParaRPr lang="en-US" sz="4000" dirty="0"/>
+            <a:endParaRPr lang="en-US" sz="4000"/>
           </a:p>
         </p:txBody>
       </p:sp>
@@ -2986,14 +2957,14 @@
               <a:buNone/>
             </a:pPr>
             <a:r>
-              <a:rPr lang="en-US" sz="1300" b="1" dirty="0">
+              <a:rPr lang="en-US" sz="1300" b="1">
                 <a:solidFill>
                   <a:srgbClr val="FFFFFF"/>
                 </a:solidFill>
               </a:rPr>
               <a:t>The Client</a:t>
             </a:r>
-            <a:endParaRPr lang="en-US" sz="1300" dirty="0"/>
+            <a:endParaRPr lang="en-US" sz="1300"/>
           </a:p>
         </p:txBody>
       </p:sp>
@@ -3022,7 +2993,7 @@
               <a:buNone/>
             </a:pPr>
             <a:r>
-              <a:rPr lang="en-US" sz="1200" dirty="0">
+              <a:rPr lang="en-US" sz="1200">
                 <a:solidFill>
                   <a:srgbClr val="1E293B"/>
                 </a:solidFill>
@@ -3032,7 +3003,7 @@
               </a:rPr>
               <a:t>A global snack manufacturer wants to launch a Healthy Snacking product line</a:t>
             </a:r>
-            <a:endParaRPr lang="en-US" sz="1200" dirty="0"/>
+            <a:endParaRPr lang="en-US" sz="1200"/>
           </a:p>
         </p:txBody>
       </p:sp>
@@ -3132,14 +3103,14 @@
               <a:buNone/>
             </a:pPr>
             <a:r>
-              <a:rPr lang="en-US" sz="1300" b="1" dirty="0">
+              <a:rPr lang="en-US" sz="1300" b="1">
                 <a:solidFill>
                   <a:srgbClr val="FFFFFF"/>
                 </a:solidFill>
               </a:rPr>
               <a:t>The Problem</a:t>
             </a:r>
-            <a:endParaRPr lang="en-US" sz="1300" dirty="0"/>
+            <a:endParaRPr lang="en-US" sz="1300"/>
           </a:p>
         </p:txBody>
       </p:sp>
@@ -3168,7 +3139,7 @@
               <a:buNone/>
             </a:pPr>
             <a:r>
-              <a:rPr lang="en-US" sz="1200" dirty="0">
+              <a:rPr lang="en-US" sz="1200">
                 <a:solidFill>
                   <a:srgbClr val="1E293B"/>
                 </a:solidFill>
@@ -3178,7 +3149,7 @@
               </a:rPr>
               <a:t>The market is oversaturated with sugary treats , but they lack data to prove where the gaps are</a:t>
             </a:r>
-            <a:endParaRPr lang="en-US" sz="1200" dirty="0"/>
+            <a:endParaRPr lang="en-US" sz="1200"/>
           </a:p>
         </p:txBody>
       </p:sp>
@@ -3278,14 +3249,14 @@
               <a:buNone/>
             </a:pPr>
             <a:r>
-              <a:rPr lang="en-US" sz="1300" b="1" dirty="0">
+              <a:rPr lang="en-US" sz="1300" b="1">
                 <a:solidFill>
                   <a:srgbClr val="FFFFFF"/>
                 </a:solidFill>
               </a:rPr>
               <a:t>Our Mission</a:t>
             </a:r>
-            <a:endParaRPr lang="en-US" sz="1300" dirty="0"/>
+            <a:endParaRPr lang="en-US" sz="1300"/>
           </a:p>
         </p:txBody>
       </p:sp>
@@ -3314,7 +3285,7 @@
               <a:buNone/>
             </a:pPr>
             <a:r>
-              <a:rPr lang="en-US" sz="1200" dirty="0">
+              <a:rPr lang="en-US" sz="1200">
                 <a:solidFill>
                   <a:srgbClr val="1E293B"/>
                 </a:solidFill>
@@ -3324,7 +3295,7 @@
               </a:rPr>
               <a:t>Use Open Food Facts (500k products) to identify where healthy demand is unmet by current supply</a:t>
             </a:r>
-            <a:endParaRPr lang="en-US" sz="1200" dirty="0"/>
+            <a:endParaRPr lang="en-US" sz="1200"/>
           </a:p>
         </p:txBody>
       </p:sp>
@@ -3418,7 +3389,7 @@
               <a:buNone/>
             </a:pPr>
             <a:r>
-              <a:rPr lang="en-US" sz="2800" b="1" dirty="0">
+              <a:rPr lang="en-US" sz="2800" b="1">
                 <a:solidFill>
                   <a:srgbClr val="FFFFFF"/>
                 </a:solidFill>
@@ -3428,7 +3399,7 @@
               </a:rPr>
               <a:t>Our Methodology — 5 Sprints</a:t>
             </a:r>
-            <a:endParaRPr lang="en-US" sz="2800" dirty="0"/>
+            <a:endParaRPr lang="en-US" sz="2800"/>
           </a:p>
         </p:txBody>
       </p:sp>
@@ -3528,14 +3499,14 @@
               <a:buNone/>
             </a:pPr>
             <a:r>
-              <a:rPr lang="en-US" sz="2000" b="1" dirty="0">
+              <a:rPr lang="en-US" sz="2000" b="1">
                 <a:solidFill>
                   <a:srgbClr val="FFFFFF"/>
                 </a:solidFill>
               </a:rPr>
               <a:t>1</a:t>
             </a:r>
-            <a:endParaRPr lang="en-US" sz="2000" dirty="0"/>
+            <a:endParaRPr lang="en-US" sz="2000"/>
           </a:p>
         </p:txBody>
       </p:sp>
@@ -3564,14 +3535,14 @@
               <a:buNone/>
             </a:pPr>
             <a:r>
-              <a:rPr lang="en-US" sz="1100" b="1" dirty="0">
+              <a:rPr lang="en-US" sz="1100" b="1">
                 <a:solidFill>
                   <a:srgbClr val="64748B"/>
                 </a:solidFill>
               </a:rPr>
               <a:t>Sprint 1</a:t>
             </a:r>
-            <a:endParaRPr lang="en-US" sz="1100" dirty="0"/>
+            <a:endParaRPr lang="en-US" sz="1100"/>
           </a:p>
         </p:txBody>
       </p:sp>
@@ -3600,7 +3571,7 @@
               <a:buNone/>
             </a:pPr>
             <a:r>
-              <a:rPr lang="en-US" sz="1300" b="1" dirty="0">
+              <a:rPr lang="en-US" sz="1300" b="1">
                 <a:solidFill>
                   <a:srgbClr val="1F3864"/>
                 </a:solidFill>
@@ -3610,7 +3581,7 @@
               </a:rPr>
               <a:t>Data Cleaning</a:t>
             </a:r>
-            <a:endParaRPr lang="en-US" sz="1300" dirty="0"/>
+            <a:endParaRPr lang="en-US" sz="1300"/>
           </a:p>
         </p:txBody>
       </p:sp>
@@ -3639,7 +3610,7 @@
               <a:buNone/>
             </a:pPr>
             <a:r>
-              <a:rPr lang="en-US" sz="1000" dirty="0">
+              <a:rPr lang="en-US" sz="1000">
                 <a:solidFill>
                   <a:srgbClr val="1E293B"/>
                 </a:solidFill>
@@ -3649,7 +3620,7 @@
               </a:rPr>
               <a:t>500k rows loaded. Nulls removed. Impossible values filtered. Duplicates dropped.</a:t>
             </a:r>
-            <a:endParaRPr lang="en-US" sz="1000" dirty="0"/>
+            <a:endParaRPr lang="en-US" sz="1000"/>
           </a:p>
         </p:txBody>
       </p:sp>
@@ -3749,14 +3720,14 @@
               <a:buNone/>
             </a:pPr>
             <a:r>
-              <a:rPr lang="en-US" sz="2000" b="1" dirty="0">
+              <a:rPr lang="en-US" sz="2000" b="1">
                 <a:solidFill>
                   <a:srgbClr val="FFFFFF"/>
                 </a:solidFill>
               </a:rPr>
               <a:t>2</a:t>
             </a:r>
-            <a:endParaRPr lang="en-US" sz="2000" dirty="0"/>
+            <a:endParaRPr lang="en-US" sz="2000"/>
           </a:p>
         </p:txBody>
       </p:sp>
@@ -3785,14 +3756,14 @@
               <a:buNone/>
             </a:pPr>
             <a:r>
-              <a:rPr lang="en-US" sz="1100" b="1" dirty="0">
+              <a:rPr lang="en-US" sz="1100" b="1">
                 <a:solidFill>
                   <a:srgbClr val="64748B"/>
                 </a:solidFill>
               </a:rPr>
               <a:t>Sprint 2</a:t>
             </a:r>
-            <a:endParaRPr lang="en-US" sz="1100" dirty="0"/>
+            <a:endParaRPr lang="en-US" sz="1100"/>
           </a:p>
         </p:txBody>
       </p:sp>
@@ -3821,7 +3792,7 @@
               <a:buNone/>
             </a:pPr>
             <a:r>
-              <a:rPr lang="en-US" sz="1300" b="1" dirty="0">
+              <a:rPr lang="en-US" sz="1300" b="1">
                 <a:solidFill>
                   <a:srgbClr val="1F3864"/>
                 </a:solidFill>
@@ -3831,7 +3802,7 @@
               </a:rPr>
               <a:t>Category Wrangling</a:t>
             </a:r>
-            <a:endParaRPr lang="en-US" sz="1300" dirty="0"/>
+            <a:endParaRPr lang="en-US" sz="1300"/>
           </a:p>
         </p:txBody>
       </p:sp>
@@ -3860,7 +3831,7 @@
               <a:buNone/>
             </a:pPr>
             <a:r>
-              <a:rPr lang="en-US" sz="1000" dirty="0">
+              <a:rPr lang="en-US" sz="1000">
                 <a:solidFill>
                   <a:srgbClr val="1E293B"/>
                 </a:solidFill>
@@ -3870,7 +3841,7 @@
               </a:rPr>
               <a:t>15 clean category buckets created from 10,000 messy raw tags.</a:t>
             </a:r>
-            <a:endParaRPr lang="en-US" sz="1000" dirty="0"/>
+            <a:endParaRPr lang="en-US" sz="1000"/>
           </a:p>
         </p:txBody>
       </p:sp>
@@ -3970,14 +3941,14 @@
               <a:buNone/>
             </a:pPr>
             <a:r>
-              <a:rPr lang="en-US" sz="2000" b="1" dirty="0">
+              <a:rPr lang="en-US" sz="2000" b="1">
                 <a:solidFill>
                   <a:srgbClr val="FFFFFF"/>
                 </a:solidFill>
               </a:rPr>
               <a:t>3</a:t>
             </a:r>
-            <a:endParaRPr lang="en-US" sz="2000" dirty="0"/>
+            <a:endParaRPr lang="en-US" sz="2000"/>
           </a:p>
         </p:txBody>
       </p:sp>
@@ -4006,14 +3977,14 @@
               <a:buNone/>
             </a:pPr>
             <a:r>
-              <a:rPr lang="en-US" sz="1100" b="1" dirty="0">
+              <a:rPr lang="en-US" sz="1100" b="1">
                 <a:solidFill>
                   <a:srgbClr val="64748B"/>
                 </a:solidFill>
               </a:rPr>
               <a:t>Sprint 3</a:t>
             </a:r>
-            <a:endParaRPr lang="en-US" sz="1100" dirty="0"/>
+            <a:endParaRPr lang="en-US" sz="1100"/>
           </a:p>
         </p:txBody>
       </p:sp>
@@ -4042,7 +4013,7 @@
               <a:buNone/>
             </a:pPr>
             <a:r>
-              <a:rPr lang="en-US" sz="1300" b="1" dirty="0">
+              <a:rPr lang="en-US" sz="1300" b="1">
                 <a:solidFill>
                   <a:srgbClr val="1F3864"/>
                 </a:solidFill>
@@ -4052,7 +4023,7 @@
               </a:rPr>
               <a:t>Nutrient Matrix</a:t>
             </a:r>
-            <a:endParaRPr lang="en-US" sz="1300" dirty="0"/>
+            <a:endParaRPr lang="en-US" sz="1300"/>
           </a:p>
         </p:txBody>
       </p:sp>
@@ -4081,7 +4052,7 @@
               <a:buNone/>
             </a:pPr>
             <a:r>
-              <a:rPr lang="en-US" sz="1000" dirty="0">
+              <a:rPr lang="en-US" sz="1000">
                 <a:solidFill>
                   <a:srgbClr val="1E293B"/>
                 </a:solidFill>
@@ -4091,7 +4062,7 @@
               </a:rPr>
               <a:t>Scatter plot built, Sugar vs Protein , revealing the empty healthy quadrant.</a:t>
             </a:r>
-            <a:endParaRPr lang="en-US" sz="1000" dirty="0"/>
+            <a:endParaRPr lang="en-US" sz="1000"/>
           </a:p>
         </p:txBody>
       </p:sp>
@@ -4191,14 +4162,14 @@
               <a:buNone/>
             </a:pPr>
             <a:r>
-              <a:rPr lang="en-US" sz="2000" b="1" dirty="0">
+              <a:rPr lang="en-US" sz="2000" b="1">
                 <a:solidFill>
                   <a:srgbClr val="FFFFFF"/>
                 </a:solidFill>
               </a:rPr>
               <a:t>4</a:t>
             </a:r>
-            <a:endParaRPr lang="en-US" sz="2000" dirty="0"/>
+            <a:endParaRPr lang="en-US" sz="2000"/>
           </a:p>
         </p:txBody>
       </p:sp>
@@ -4227,14 +4198,14 @@
               <a:buNone/>
             </a:pPr>
             <a:r>
-              <a:rPr lang="en-US" sz="1100" b="1" dirty="0">
+              <a:rPr lang="en-US" sz="1100" b="1">
                 <a:solidFill>
                   <a:srgbClr val="64748B"/>
                 </a:solidFill>
               </a:rPr>
               <a:t>Sprint 4</a:t>
             </a:r>
-            <a:endParaRPr lang="en-US" sz="1100" dirty="0"/>
+            <a:endParaRPr lang="en-US" sz="1100"/>
           </a:p>
         </p:txBody>
       </p:sp>
@@ -4263,7 +4234,7 @@
               <a:buNone/>
             </a:pPr>
             <a:r>
-              <a:rPr lang="en-US" sz="1300" b="1" dirty="0">
+              <a:rPr lang="en-US" sz="1300" b="1">
                 <a:solidFill>
                   <a:srgbClr val="1F3864"/>
                 </a:solidFill>
@@ -4273,7 +4244,7 @@
               </a:rPr>
               <a:t>Recommendation</a:t>
             </a:r>
-            <a:endParaRPr lang="en-US" sz="1300" dirty="0"/>
+            <a:endParaRPr lang="en-US" sz="1300"/>
           </a:p>
         </p:txBody>
       </p:sp>
@@ -4302,7 +4273,7 @@
               <a:buNone/>
             </a:pPr>
             <a:r>
-              <a:rPr lang="en-US" sz="1000" dirty="0">
+              <a:rPr lang="en-US" sz="1000">
                 <a:solidFill>
                   <a:srgbClr val="1E293B"/>
                 </a:solidFill>
@@ -4312,7 +4283,7 @@
               </a:rPr>
               <a:t>Gap Index calculated. Top 3 opportunity categories identified. Key Insight generated.</a:t>
             </a:r>
-            <a:endParaRPr lang="en-US" sz="1000" dirty="0"/>
+            <a:endParaRPr lang="en-US" sz="1000"/>
           </a:p>
         </p:txBody>
       </p:sp>
@@ -4412,14 +4383,14 @@
               <a:buNone/>
             </a:pPr>
             <a:r>
-              <a:rPr lang="en-US" sz="2000" b="1" dirty="0">
+              <a:rPr lang="en-US" sz="2000" b="1">
                 <a:solidFill>
                   <a:srgbClr val="FFFFFF"/>
                 </a:solidFill>
               </a:rPr>
               <a:t>5</a:t>
             </a:r>
-            <a:endParaRPr lang="en-US" sz="2000" dirty="0"/>
+            <a:endParaRPr lang="en-US" sz="2000"/>
           </a:p>
         </p:txBody>
       </p:sp>
@@ -4448,14 +4419,14 @@
               <a:buNone/>
             </a:pPr>
             <a:r>
-              <a:rPr lang="en-US" sz="1100" b="1" dirty="0">
+              <a:rPr lang="en-US" sz="1100" b="1">
                 <a:solidFill>
                   <a:srgbClr val="64748B"/>
                 </a:solidFill>
               </a:rPr>
               <a:t>Sprint 5</a:t>
             </a:r>
-            <a:endParaRPr lang="en-US" sz="1100" dirty="0"/>
+            <a:endParaRPr lang="en-US" sz="1100"/>
           </a:p>
         </p:txBody>
       </p:sp>
@@ -4484,7 +4455,7 @@
               <a:buNone/>
             </a:pPr>
             <a:r>
-              <a:rPr lang="en-US" sz="1300" b="1" dirty="0">
+              <a:rPr lang="en-US" sz="1300" b="1">
                 <a:solidFill>
                   <a:srgbClr val="1F3864"/>
                 </a:solidFill>
@@ -4494,7 +4465,7 @@
               </a:rPr>
               <a:t>Candidate's Choice</a:t>
             </a:r>
-            <a:endParaRPr lang="en-US" sz="1300" dirty="0"/>
+            <a:endParaRPr lang="en-US" sz="1300"/>
           </a:p>
         </p:txBody>
       </p:sp>
@@ -4523,7 +4494,7 @@
               <a:buNone/>
             </a:pPr>
             <a:r>
-              <a:rPr lang="en-US" sz="1000" dirty="0">
+              <a:rPr lang="en-US" sz="1000">
                 <a:solidFill>
                   <a:srgbClr val="1E293B"/>
                 </a:solidFill>
@@ -4533,7 +4504,7 @@
               </a:rPr>
               <a:t>Triple Opportunity Index: Protein + Fiber + Sugar , revealing an even rarer market position.</a:t>
             </a:r>
-            <a:endParaRPr lang="en-US" sz="1000" dirty="0"/>
+            <a:endParaRPr lang="en-US" sz="1000"/>
           </a:p>
         </p:txBody>
       </p:sp>
@@ -4627,7 +4598,7 @@
               <a:buNone/>
             </a:pPr>
             <a:r>
-              <a:rPr lang="en-US" sz="2800" b="1" dirty="0">
+              <a:rPr lang="en-US" sz="2800" b="1">
                 <a:solidFill>
                   <a:srgbClr val="FFFFFF"/>
                 </a:solidFill>
@@ -4637,7 +4608,7 @@
               </a:rPr>
               <a:t>Key Finding - The Market Gap</a:t>
             </a:r>
-            <a:endParaRPr lang="en-US" sz="2800" dirty="0"/>
+            <a:endParaRPr lang="en-US" sz="2800"/>
           </a:p>
         </p:txBody>
       </p:sp>
@@ -4705,7 +4676,7 @@
               <a:buNone/>
             </a:pPr>
             <a:r>
-              <a:rPr lang="en-US" sz="3200" b="1" dirty="0">
+              <a:rPr lang="en-US" sz="3200" b="1">
                 <a:solidFill>
                   <a:srgbClr val="1F3864"/>
                 </a:solidFill>
@@ -4715,7 +4686,7 @@
               </a:rPr>
               <a:t>487K+</a:t>
             </a:r>
-            <a:endParaRPr lang="en-US" sz="3200" dirty="0"/>
+            <a:endParaRPr lang="en-US" sz="3200"/>
           </a:p>
         </p:txBody>
       </p:sp>
@@ -4744,14 +4715,14 @@
               <a:buNone/>
             </a:pPr>
             <a:r>
-              <a:rPr lang="en-US" sz="1200" b="1" dirty="0">
+              <a:rPr lang="en-US" sz="1200" b="1">
                 <a:solidFill>
                   <a:srgbClr val="1E293B"/>
                 </a:solidFill>
               </a:rPr>
               <a:t>Products Analysed</a:t>
             </a:r>
-            <a:endParaRPr lang="en-US" sz="1200" dirty="0"/>
+            <a:endParaRPr lang="en-US" sz="1200"/>
           </a:p>
         </p:txBody>
       </p:sp>
@@ -4780,14 +4751,14 @@
               <a:buNone/>
             </a:pPr>
             <a:r>
-              <a:rPr lang="en-US" sz="1000" dirty="0">
+              <a:rPr lang="en-US" sz="1000">
                 <a:solidFill>
                   <a:srgbClr val="64748B"/>
                 </a:solidFill>
               </a:rPr>
               <a:t>after cleaning</a:t>
             </a:r>
-            <a:endParaRPr lang="en-US" sz="1000" dirty="0"/>
+            <a:endParaRPr lang="en-US" sz="1000"/>
           </a:p>
         </p:txBody>
       </p:sp>
@@ -4855,7 +4826,7 @@
               <a:buNone/>
             </a:pPr>
             <a:r>
-              <a:rPr lang="en-US" sz="3200" b="1" dirty="0">
+              <a:rPr lang="en-US" sz="3200" b="1">
                 <a:solidFill>
                   <a:srgbClr val="791F1F"/>
                 </a:solidFill>
@@ -4865,7 +4836,7 @@
               </a:rPr>
               <a:t>71.4%</a:t>
             </a:r>
-            <a:endParaRPr lang="en-US" sz="3200" dirty="0"/>
+            <a:endParaRPr lang="en-US" sz="3200"/>
           </a:p>
         </p:txBody>
       </p:sp>
@@ -4894,14 +4865,14 @@
               <a:buNone/>
             </a:pPr>
             <a:r>
-              <a:rPr lang="en-US" sz="1200" b="1" dirty="0">
+              <a:rPr lang="en-US" sz="1200" b="1">
                 <a:solidFill>
                   <a:srgbClr val="1E293B"/>
                 </a:solidFill>
               </a:rPr>
               <a:t>In Danger Zone</a:t>
             </a:r>
-            <a:endParaRPr lang="en-US" sz="1200" dirty="0"/>
+            <a:endParaRPr lang="en-US" sz="1200"/>
           </a:p>
         </p:txBody>
       </p:sp>
@@ -4930,14 +4901,14 @@
               <a:buNone/>
             </a:pPr>
             <a:r>
-              <a:rPr lang="en-US" sz="1000" dirty="0">
+              <a:rPr lang="en-US" sz="1000">
                 <a:solidFill>
                   <a:srgbClr val="64748B"/>
                 </a:solidFill>
               </a:rPr>
               <a:t>high sugar + low protein</a:t>
             </a:r>
-            <a:endParaRPr lang="en-US" sz="1000" dirty="0"/>
+            <a:endParaRPr lang="en-US" sz="1000"/>
           </a:p>
         </p:txBody>
       </p:sp>
@@ -5005,7 +4976,7 @@
               <a:buNone/>
             </a:pPr>
             <a:r>
-              <a:rPr lang="en-US" sz="3200" b="1" dirty="0">
+              <a:rPr lang="en-US" sz="3200" b="1">
                 <a:solidFill>
                   <a:srgbClr val="3B6D11"/>
                 </a:solidFill>
@@ -5015,7 +4986,7 @@
               </a:rPr>
               <a:t>4.2%</a:t>
             </a:r>
-            <a:endParaRPr lang="en-US" sz="3200" dirty="0"/>
+            <a:endParaRPr lang="en-US" sz="3200"/>
           </a:p>
         </p:txBody>
       </p:sp>
@@ -5044,14 +5015,14 @@
               <a:buNone/>
             </a:pPr>
             <a:r>
-              <a:rPr lang="en-US" sz="1200" b="1" dirty="0">
+              <a:rPr lang="en-US" sz="1200" b="1">
                 <a:solidFill>
                   <a:srgbClr val="1E293B"/>
                 </a:solidFill>
               </a:rPr>
               <a:t>In Blue Ocean</a:t>
             </a:r>
-            <a:endParaRPr lang="en-US" sz="1200" dirty="0"/>
+            <a:endParaRPr lang="en-US" sz="1200"/>
           </a:p>
         </p:txBody>
       </p:sp>
@@ -5080,14 +5051,14 @@
               <a:buNone/>
             </a:pPr>
             <a:r>
-              <a:rPr lang="en-US" sz="1000" dirty="0">
+              <a:rPr lang="en-US" sz="1000">
                 <a:solidFill>
                   <a:srgbClr val="64748B"/>
                 </a:solidFill>
               </a:rPr>
               <a:t>high protein + low sugar</a:t>
             </a:r>
-            <a:endParaRPr lang="en-US" sz="1000" dirty="0"/>
+            <a:endParaRPr lang="en-US" sz="1000"/>
           </a:p>
         </p:txBody>
       </p:sp>
@@ -5155,7 +5126,7 @@
               <a:buNone/>
             </a:pPr>
             <a:r>
-              <a:rPr lang="en-US" sz="3200" b="1" dirty="0">
+              <a:rPr lang="en-US" sz="3200" b="1">
                 <a:solidFill>
                   <a:srgbClr val="791F1F"/>
                 </a:solidFill>
@@ -5165,7 +5136,7 @@
               </a:rPr>
               <a:t>0%</a:t>
             </a:r>
-            <a:endParaRPr lang="en-US" sz="3200" dirty="0"/>
+            <a:endParaRPr lang="en-US" sz="3200"/>
           </a:p>
         </p:txBody>
       </p:sp>
@@ -5194,14 +5165,14 @@
               <a:buNone/>
             </a:pPr>
             <a:r>
-              <a:rPr lang="en-US" sz="1200" b="1" dirty="0">
+              <a:rPr lang="en-US" sz="1200" b="1">
                 <a:solidFill>
                   <a:srgbClr val="1E293B"/>
                 </a:solidFill>
               </a:rPr>
               <a:t>Top 3 Opportunity</a:t>
             </a:r>
-            <a:endParaRPr lang="en-US" sz="1200" dirty="0"/>
+            <a:endParaRPr lang="en-US" sz="1200"/>
           </a:p>
         </p:txBody>
       </p:sp>
@@ -5230,14 +5201,14 @@
               <a:buNone/>
             </a:pPr>
             <a:r>
-              <a:rPr lang="en-US" sz="1000" dirty="0">
+              <a:rPr lang="en-US" sz="1000">
                 <a:solidFill>
                   <a:srgbClr val="64748B"/>
                 </a:solidFill>
               </a:rPr>
               <a:t>categories in healthy zone</a:t>
             </a:r>
-            <a:endParaRPr lang="en-US" sz="1000" dirty="0"/>
+            <a:endParaRPr lang="en-US" sz="1000"/>
           </a:p>
         </p:txBody>
       </p:sp>
@@ -5330,7 +5301,7 @@
               <a:buNone/>
             </a:pPr>
             <a:r>
-              <a:rPr lang="en-US" sz="1000" b="1" dirty="0">
+              <a:rPr lang="en-US" sz="1000" b="1">
                 <a:solidFill>
                   <a:srgbClr val="3B6D11"/>
                 </a:solidFill>
@@ -5340,7 +5311,7 @@
               </a:rPr>
               <a:t>KEY INSIGHT</a:t>
             </a:r>
-            <a:endParaRPr lang="en-US" sz="1000" dirty="0"/>
+            <a:endParaRPr lang="en-US" sz="1000"/>
           </a:p>
         </p:txBody>
       </p:sp>
@@ -5369,7 +5340,7 @@
               <a:buNone/>
             </a:pPr>
             <a:r>
-              <a:rPr lang="en-US" sz="1300" dirty="0">
+              <a:rPr lang="en-US" sz="1300">
                 <a:solidFill>
                   <a:srgbClr val="27500A"/>
                 </a:solidFill>
@@ -5379,7 +5350,7 @@
               </a:rPr>
               <a:t>Based on the data, the biggest market opportunities are in Ice Cream &amp; Frozen Snacks, Fruit Snacks, and Popcorn ,all with 0% of products in the high-protein, low-sugar quadrant. We recommend targeting products with &gt;= 15g protein and &lt; 8g sugar per 100g.</a:t>
             </a:r>
-            <a:endParaRPr lang="en-US" sz="1300" dirty="0"/>
+            <a:endParaRPr lang="en-US" sz="1300"/>
           </a:p>
         </p:txBody>
       </p:sp>
@@ -5473,7 +5444,7 @@
               <a:buNone/>
             </a:pPr>
             <a:r>
-              <a:rPr lang="en-US" sz="2800" b="1" dirty="0">
+              <a:rPr lang="en-US" sz="2800" b="1">
                 <a:solidFill>
                   <a:srgbClr val="FFFFFF"/>
                 </a:solidFill>
@@ -5483,7 +5454,7 @@
               </a:rPr>
               <a:t>Story 3 : The Nutrient Matrix</a:t>
             </a:r>
-            <a:endParaRPr lang="en-US" sz="2800" dirty="0"/>
+            <a:endParaRPr lang="en-US" sz="2800"/>
           </a:p>
         </p:txBody>
       </p:sp>
@@ -5512,14 +5483,14 @@
               <a:buNone/>
             </a:pPr>
             <a:r>
-              <a:rPr lang="en-US" sz="1400" dirty="0">
+              <a:rPr lang="en-US" sz="1400">
                 <a:solidFill>
                   <a:srgbClr val="64748B"/>
                 </a:solidFill>
               </a:rPr>
               <a:t>Sugar (X-axis) vs Protein (Y-axis) by Category</a:t>
             </a:r>
-            <a:endParaRPr lang="en-US" sz="1400" dirty="0"/>
+            <a:endParaRPr lang="en-US" sz="1400"/>
           </a:p>
         </p:txBody>
       </p:sp>
@@ -5580,7 +5551,7 @@
               <a:buNone/>
             </a:pPr>
             <a:r>
-              <a:rPr lang="en-US" sz="1300" b="1" dirty="0">
+              <a:rPr lang="en-US" sz="1300" b="1">
                 <a:solidFill>
                   <a:srgbClr val="3B6D11"/>
                 </a:solidFill>
@@ -5590,7 +5561,7 @@
               </a:rPr>
               <a:t>TARGET ZONE</a:t>
             </a:r>
-            <a:endParaRPr lang="en-US" sz="1300" dirty="0"/>
+            <a:endParaRPr lang="en-US" sz="1300"/>
           </a:p>
         </p:txBody>
       </p:sp>
@@ -5619,7 +5590,7 @@
               <a:buNone/>
             </a:pPr>
             <a:r>
-              <a:rPr lang="en-US" sz="1200" dirty="0">
+              <a:rPr lang="en-US" sz="1200">
                 <a:solidFill>
                   <a:srgbClr val="27500A"/>
                 </a:solidFill>
@@ -5629,14 +5600,14 @@
               </a:rPr>
               <a:t>High Protein + Low Sugar</a:t>
             </a:r>
-            <a:endParaRPr lang="en-US" sz="1200" dirty="0"/>
+            <a:endParaRPr lang="en-US" sz="1200"/>
           </a:p>
           <a:p>
             <a:pPr marL="0" indent="0">
               <a:buNone/>
             </a:pPr>
             <a:r>
-              <a:rPr lang="en-US" sz="1200" dirty="0">
+              <a:rPr lang="en-US" sz="1200">
                 <a:solidFill>
                   <a:srgbClr val="27500A"/>
                 </a:solidFill>
@@ -5646,7 +5617,7 @@
               </a:rPr>
               <a:t>Blue Ocean - virtually empty</a:t>
             </a:r>
-            <a:endParaRPr lang="en-US" sz="1200" dirty="0"/>
+            <a:endParaRPr lang="en-US" sz="1200"/>
           </a:p>
         </p:txBody>
       </p:sp>
@@ -5707,7 +5678,7 @@
               <a:buNone/>
             </a:pPr>
             <a:r>
-              <a:rPr lang="en-US" sz="1300" b="1" dirty="0">
+              <a:rPr lang="en-US" sz="1300" b="1">
                 <a:solidFill>
                   <a:srgbClr val="64748B"/>
                 </a:solidFill>
@@ -5717,7 +5688,7 @@
               </a:rPr>
               <a:t>MIDDLE GROUND</a:t>
             </a:r>
-            <a:endParaRPr lang="en-US" sz="1300" dirty="0"/>
+            <a:endParaRPr lang="en-US" sz="1300"/>
           </a:p>
         </p:txBody>
       </p:sp>
@@ -5746,7 +5717,7 @@
               <a:buNone/>
             </a:pPr>
             <a:r>
-              <a:rPr lang="en-US" sz="1200" dirty="0">
+              <a:rPr lang="en-US" sz="1200">
                 <a:solidFill>
                   <a:srgbClr val="1E293B"/>
                 </a:solidFill>
@@ -5756,14 +5727,14 @@
               </a:rPr>
               <a:t>High Protein + High Sugar</a:t>
             </a:r>
-            <a:endParaRPr lang="en-US" sz="1200" dirty="0"/>
+            <a:endParaRPr lang="en-US" sz="1200"/>
           </a:p>
           <a:p>
             <a:pPr marL="0" indent="0">
               <a:buNone/>
             </a:pPr>
             <a:r>
-              <a:rPr lang="en-US" sz="1200" dirty="0">
+              <a:rPr lang="en-US" sz="1200">
                 <a:solidFill>
                   <a:srgbClr val="1E293B"/>
                 </a:solidFill>
@@ -5773,7 +5744,7 @@
               </a:rPr>
               <a:t>Some healthy options exist</a:t>
             </a:r>
-            <a:endParaRPr lang="en-US" sz="1200" dirty="0"/>
+            <a:endParaRPr lang="en-US" sz="1200"/>
           </a:p>
         </p:txBody>
       </p:sp>
@@ -5834,7 +5805,7 @@
               <a:buNone/>
             </a:pPr>
             <a:r>
-              <a:rPr lang="en-US" sz="1300" b="1" dirty="0">
+              <a:rPr lang="en-US" sz="1300" b="1">
                 <a:solidFill>
                   <a:srgbClr val="64748B"/>
                 </a:solidFill>
@@ -5844,7 +5815,7 @@
               </a:rPr>
               <a:t>LOW PROTEIN</a:t>
             </a:r>
-            <a:endParaRPr lang="en-US" sz="1300" dirty="0"/>
+            <a:endParaRPr lang="en-US" sz="1300"/>
           </a:p>
         </p:txBody>
       </p:sp>
@@ -5873,7 +5844,7 @@
               <a:buNone/>
             </a:pPr>
             <a:r>
-              <a:rPr lang="en-US" sz="1200" dirty="0">
+              <a:rPr lang="en-US" sz="1200">
                 <a:solidFill>
                   <a:srgbClr val="1E293B"/>
                 </a:solidFill>
@@ -5883,14 +5854,14 @@
               </a:rPr>
               <a:t>Low Protein + Low Sugar</a:t>
             </a:r>
-            <a:endParaRPr lang="en-US" sz="1200" dirty="0"/>
+            <a:endParaRPr lang="en-US" sz="1200"/>
           </a:p>
           <a:p>
             <a:pPr marL="0" indent="0">
               <a:buNone/>
             </a:pPr>
             <a:r>
-              <a:rPr lang="en-US" sz="1200" dirty="0">
+              <a:rPr lang="en-US" sz="1200">
                 <a:solidFill>
                   <a:srgbClr val="1E293B"/>
                 </a:solidFill>
@@ -5900,7 +5871,7 @@
               </a:rPr>
               <a:t>Limited consumer appeal</a:t>
             </a:r>
-            <a:endParaRPr lang="en-US" sz="1200" dirty="0"/>
+            <a:endParaRPr lang="en-US" sz="1200"/>
           </a:p>
         </p:txBody>
       </p:sp>
@@ -5961,7 +5932,7 @@
               <a:buNone/>
             </a:pPr>
             <a:r>
-              <a:rPr lang="en-US" sz="1300" b="1" dirty="0">
+              <a:rPr lang="en-US" sz="1300" b="1">
                 <a:solidFill>
                   <a:srgbClr val="791F1F"/>
                 </a:solidFill>
@@ -5971,7 +5942,7 @@
               </a:rPr>
               <a:t>DANGER ZONE</a:t>
             </a:r>
-            <a:endParaRPr lang="en-US" sz="1300" dirty="0"/>
+            <a:endParaRPr lang="en-US" sz="1300"/>
           </a:p>
         </p:txBody>
       </p:sp>
@@ -6000,7 +5971,7 @@
               <a:buNone/>
             </a:pPr>
             <a:r>
-              <a:rPr lang="en-US" sz="1200" dirty="0">
+              <a:rPr lang="en-US" sz="1200">
                 <a:solidFill>
                   <a:srgbClr val="791F1F"/>
                 </a:solidFill>
@@ -6010,14 +5981,14 @@
               </a:rPr>
               <a:t>High Sugar + Low Protein</a:t>
             </a:r>
-            <a:endParaRPr lang="en-US" sz="1200" dirty="0"/>
+            <a:endParaRPr lang="en-US" sz="1200"/>
           </a:p>
           <a:p>
             <a:pPr marL="0" indent="0">
               <a:buNone/>
             </a:pPr>
             <a:r>
-              <a:rPr lang="en-US" sz="1200" dirty="0">
+              <a:rPr lang="en-US" sz="1200">
                 <a:solidFill>
                   <a:srgbClr val="791F1F"/>
                 </a:solidFill>
@@ -6027,7 +5998,7 @@
               </a:rPr>
               <a:t>Oversaturated — most products here</a:t>
             </a:r>
-            <a:endParaRPr lang="en-US" sz="1200" dirty="0"/>
+            <a:endParaRPr lang="en-US" sz="1200"/>
           </a:p>
         </p:txBody>
       </p:sp>
@@ -6115,7 +6086,7 @@
             <a:pPr marL="0" indent="0">
               <a:buNone/>
             </a:pPr>
-            <a:endParaRPr lang="en-US" sz="1000" dirty="0"/>
+            <a:endParaRPr lang="en-US" sz="1000"/>
           </a:p>
         </p:txBody>
       </p:sp>
@@ -6144,14 +6115,14 @@
               <a:buNone/>
             </a:pPr>
             <a:r>
-              <a:rPr lang="en-US" sz="1000" b="1" dirty="0">
+              <a:rPr lang="en-US" sz="1000" b="1">
                 <a:solidFill>
                   <a:srgbClr val="2A9D8F"/>
                 </a:solidFill>
               </a:rPr>
               <a:t>15g Protein</a:t>
             </a:r>
-            <a:endParaRPr lang="en-US" sz="1000" dirty="0"/>
+            <a:endParaRPr lang="en-US" sz="1000"/>
           </a:p>
         </p:txBody>
       </p:sp>
@@ -6180,7 +6151,7 @@
               <a:buNone/>
             </a:pPr>
             <a:r>
-              <a:rPr lang="en-US" sz="1200" dirty="0">
+              <a:rPr lang="en-US" sz="1200">
                 <a:solidFill>
                   <a:srgbClr val="1E293B"/>
                 </a:solidFill>
@@ -6190,7 +6161,7 @@
               </a:rPr>
               <a:t>Key takeaway: less products are in the Target Zone. The dashboard scatter plot shows this visually  clusters concentrated in the Danger Zone.</a:t>
             </a:r>
-            <a:endParaRPr lang="en-US" sz="1200" dirty="0"/>
+            <a:endParaRPr lang="en-US" sz="1200"/>
           </a:p>
         </p:txBody>
       </p:sp>
@@ -6284,7 +6255,7 @@
               <a:buNone/>
             </a:pPr>
             <a:r>
-              <a:rPr lang="en-US" sz="2800" b="1" dirty="0">
+              <a:rPr lang="en-US" sz="2800" b="1">
                 <a:solidFill>
                   <a:srgbClr val="FFFFFF"/>
                 </a:solidFill>
@@ -6294,7 +6265,7 @@
               </a:rPr>
               <a:t>Story 4 :The Recommendation</a:t>
             </a:r>
-            <a:endParaRPr lang="en-US" sz="2800" dirty="0"/>
+            <a:endParaRPr lang="en-US" sz="2800"/>
           </a:p>
         </p:txBody>
       </p:sp>
@@ -6323,14 +6294,14 @@
               <a:buNone/>
             </a:pPr>
             <a:r>
-              <a:rPr lang="en-US" sz="1300" dirty="0">
+              <a:rPr lang="en-US" sz="1300">
                 <a:solidFill>
                   <a:srgbClr val="64748B"/>
                 </a:solidFill>
               </a:rPr>
               <a:t>Gap Index - % of Products Already in Healthy Zone (Lower = Bigger Opportunity)</a:t>
             </a:r>
-            <a:endParaRPr lang="en-US" sz="1300" dirty="0"/>
+            <a:endParaRPr lang="en-US" sz="1300"/>
           </a:p>
         </p:txBody>
       </p:sp>
@@ -6375,7 +6346,7 @@
               <a:buNone/>
             </a:pPr>
             <a:r>
-              <a:rPr lang="en-US" sz="1200" b="1" dirty="0">
+              <a:rPr lang="en-US" sz="1200" b="1">
                 <a:solidFill>
                   <a:srgbClr val="1F3864"/>
                 </a:solidFill>
@@ -6385,7 +6356,7 @@
               </a:rPr>
               <a:t>TOP OPPORTUNITIES</a:t>
             </a:r>
-            <a:endParaRPr lang="en-US" sz="1200" dirty="0"/>
+            <a:endParaRPr lang="en-US" sz="1200"/>
           </a:p>
         </p:txBody>
       </p:sp>
@@ -6453,14 +6424,14 @@
               <a:buNone/>
             </a:pPr>
             <a:r>
-              <a:rPr lang="en-US" sz="1600" b="1" dirty="0">
+              <a:rPr lang="en-US" sz="1600" b="1">
                 <a:solidFill>
                   <a:srgbClr val="E63946"/>
                 </a:solidFill>
               </a:rPr>
               <a:t>1.</a:t>
             </a:r>
-            <a:endParaRPr lang="en-US" sz="1600" dirty="0"/>
+            <a:endParaRPr lang="en-US" sz="1600"/>
           </a:p>
         </p:txBody>
       </p:sp>
@@ -6489,14 +6460,14 @@
               <a:buNone/>
             </a:pPr>
             <a:r>
-              <a:rPr lang="en-US" sz="1300" b="1" dirty="0">
+              <a:rPr lang="en-US" sz="1300" b="1">
                 <a:solidFill>
                   <a:srgbClr val="501313"/>
                 </a:solidFill>
               </a:rPr>
               <a:t>Ice Cream &amp; Frozen</a:t>
             </a:r>
-            <a:endParaRPr lang="en-US" sz="1300" dirty="0"/>
+            <a:endParaRPr lang="en-US" sz="1300"/>
           </a:p>
         </p:txBody>
       </p:sp>
@@ -6525,14 +6496,14 @@
               <a:buNone/>
             </a:pPr>
             <a:r>
-              <a:rPr lang="en-US" sz="1000" dirty="0">
+              <a:rPr lang="en-US" sz="1000">
                 <a:solidFill>
                   <a:srgbClr val="791F1F"/>
                 </a:solidFill>
               </a:rPr>
               <a:t>0.0% in healthy zone</a:t>
             </a:r>
-            <a:endParaRPr lang="en-US" sz="1000" dirty="0"/>
+            <a:endParaRPr lang="en-US" sz="1000"/>
           </a:p>
         </p:txBody>
       </p:sp>
@@ -6600,14 +6571,14 @@
               <a:buNone/>
             </a:pPr>
             <a:r>
-              <a:rPr lang="en-US" sz="1600" b="1" dirty="0">
+              <a:rPr lang="en-US" sz="1600" b="1">
                 <a:solidFill>
                   <a:srgbClr val="E63946"/>
                 </a:solidFill>
               </a:rPr>
               <a:t>2.</a:t>
             </a:r>
-            <a:endParaRPr lang="en-US" sz="1600" dirty="0"/>
+            <a:endParaRPr lang="en-US" sz="1600"/>
           </a:p>
         </p:txBody>
       </p:sp>
@@ -6636,14 +6607,14 @@
               <a:buNone/>
             </a:pPr>
             <a:r>
-              <a:rPr lang="en-US" sz="1300" b="1" dirty="0">
+              <a:rPr lang="en-US" sz="1300" b="1">
                 <a:solidFill>
                   <a:srgbClr val="501313"/>
                 </a:solidFill>
               </a:rPr>
               <a:t>Fruit Snacks</a:t>
             </a:r>
-            <a:endParaRPr lang="en-US" sz="1300" dirty="0"/>
+            <a:endParaRPr lang="en-US" sz="1300"/>
           </a:p>
         </p:txBody>
       </p:sp>
@@ -6672,14 +6643,14 @@
               <a:buNone/>
             </a:pPr>
             <a:r>
-              <a:rPr lang="en-US" sz="1000" dirty="0">
+              <a:rPr lang="en-US" sz="1000">
                 <a:solidFill>
                   <a:srgbClr val="791F1F"/>
                 </a:solidFill>
               </a:rPr>
               <a:t>0.0% in healthy zone</a:t>
             </a:r>
-            <a:endParaRPr lang="en-US" sz="1000" dirty="0"/>
+            <a:endParaRPr lang="en-US" sz="1000"/>
           </a:p>
         </p:txBody>
       </p:sp>
@@ -6747,14 +6718,14 @@
               <a:buNone/>
             </a:pPr>
             <a:r>
-              <a:rPr lang="en-US" sz="1600" b="1" dirty="0">
+              <a:rPr lang="en-US" sz="1600" b="1">
                 <a:solidFill>
                   <a:srgbClr val="E63946"/>
                 </a:solidFill>
               </a:rPr>
               <a:t>3.</a:t>
             </a:r>
-            <a:endParaRPr lang="en-US" sz="1600" dirty="0"/>
+            <a:endParaRPr lang="en-US" sz="1600"/>
           </a:p>
         </p:txBody>
       </p:sp>
@@ -6783,14 +6754,14 @@
               <a:buNone/>
             </a:pPr>
             <a:r>
-              <a:rPr lang="en-US" sz="1300" b="1" dirty="0">
+              <a:rPr lang="en-US" sz="1300" b="1">
                 <a:solidFill>
                   <a:srgbClr val="501313"/>
                 </a:solidFill>
               </a:rPr>
               <a:t>Popcorn</a:t>
             </a:r>
-            <a:endParaRPr lang="en-US" sz="1300" dirty="0"/>
+            <a:endParaRPr lang="en-US" sz="1300"/>
           </a:p>
         </p:txBody>
       </p:sp>
@@ -6819,14 +6790,14 @@
               <a:buNone/>
             </a:pPr>
             <a:r>
-              <a:rPr lang="en-US" sz="1000" dirty="0">
+              <a:rPr lang="en-US" sz="1000">
                 <a:solidFill>
                   <a:srgbClr val="791F1F"/>
                 </a:solidFill>
               </a:rPr>
               <a:t>0.0% in healthy zone</a:t>
             </a:r>
-            <a:endParaRPr lang="en-US" sz="1000" dirty="0"/>
+            <a:endParaRPr lang="en-US" sz="1000"/>
           </a:p>
         </p:txBody>
       </p:sp>
@@ -6887,28 +6858,28 @@
               <a:buNone/>
             </a:pPr>
             <a:r>
-              <a:rPr lang="en-US" sz="1100" b="1" dirty="0">
+              <a:rPr lang="en-US" sz="1100" b="1">
                 <a:solidFill>
                   <a:srgbClr val="27500A"/>
                 </a:solidFill>
               </a:rPr>
               <a:t>R&amp;D Target: &gt;= 15g protein</a:t>
             </a:r>
-            <a:endParaRPr lang="en-US" sz="1100" dirty="0"/>
+            <a:endParaRPr lang="en-US" sz="1100"/>
           </a:p>
           <a:p>
             <a:pPr marL="0" indent="0">
               <a:buNone/>
             </a:pPr>
             <a:r>
-              <a:rPr lang="en-US" sz="1100" b="1" dirty="0">
+              <a:rPr lang="en-US" sz="1100" b="1">
                 <a:solidFill>
                   <a:srgbClr val="27500A"/>
                 </a:solidFill>
               </a:rPr>
               <a:t>and &lt; 8g sugar per 100g</a:t>
             </a:r>
-            <a:endParaRPr lang="en-US" sz="1100" dirty="0"/>
+            <a:endParaRPr lang="en-US" sz="1100"/>
           </a:p>
         </p:txBody>
       </p:sp>
@@ -7002,7 +6973,7 @@
               <a:buNone/>
             </a:pPr>
             <a:r>
-              <a:rPr lang="en-US" sz="2800" b="1" dirty="0">
+              <a:rPr lang="en-US" sz="2800" b="1">
                 <a:solidFill>
                   <a:srgbClr val="FFFFFF"/>
                 </a:solidFill>
@@ -7012,7 +6983,7 @@
               </a:rPr>
               <a:t>Story 5 : The Hidden Gem</a:t>
             </a:r>
-            <a:endParaRPr lang="en-US" sz="2800" dirty="0"/>
+            <a:endParaRPr lang="en-US" sz="2800"/>
           </a:p>
         </p:txBody>
       </p:sp>
@@ -7041,14 +7012,14 @@
               <a:buNone/>
             </a:pPr>
             <a:r>
-              <a:rPr lang="en-US" sz="1300" dirty="0">
+              <a:rPr lang="en-US" sz="1300">
                 <a:solidFill>
                   <a:srgbClr val="64748B"/>
                 </a:solidFill>
               </a:rPr>
               <a:t>Top Protein Sources in High-Protein Snacks (&gt;= 15g protein per 100g)</a:t>
             </a:r>
-            <a:endParaRPr lang="en-US" sz="1300" dirty="0"/>
+            <a:endParaRPr lang="en-US" sz="1300"/>
           </a:p>
         </p:txBody>
       </p:sp>
@@ -7077,14 +7048,14 @@
               <a:buNone/>
             </a:pPr>
             <a:r>
-              <a:rPr lang="en-US" sz="1200" b="1" dirty="0">
+              <a:rPr lang="en-US" sz="1200" b="1">
                 <a:solidFill>
                   <a:srgbClr val="1F3864"/>
                 </a:solidFill>
               </a:rPr>
               <a:t>R&amp;D RECOMMENDATION</a:t>
             </a:r>
-            <a:endParaRPr lang="en-US" sz="1200" dirty="0"/>
+            <a:endParaRPr lang="en-US" sz="1200"/>
           </a:p>
         </p:txBody>
       </p:sp>
@@ -7184,14 +7155,14 @@
               <a:buNone/>
             </a:pPr>
             <a:r>
-              <a:rPr lang="en-US" sz="1600" b="1" dirty="0">
+              <a:rPr lang="en-US" sz="1600" b="1">
                 <a:solidFill>
                   <a:srgbClr val="FFFFFF"/>
                 </a:solidFill>
               </a:rPr>
               <a:t>1</a:t>
             </a:r>
-            <a:endParaRPr lang="en-US" sz="1600" dirty="0"/>
+            <a:endParaRPr lang="en-US" sz="1600"/>
           </a:p>
         </p:txBody>
       </p:sp>
@@ -7220,14 +7191,14 @@
               <a:buNone/>
             </a:pPr>
             <a:r>
-              <a:rPr lang="en-US" sz="1400" b="1" dirty="0">
+              <a:rPr lang="en-US" sz="1400" b="1">
                 <a:solidFill>
                   <a:srgbClr val="0F6E56"/>
                 </a:solidFill>
               </a:rPr>
               <a:t>Soy</a:t>
             </a:r>
-            <a:endParaRPr lang="en-US" sz="1400" dirty="0"/>
+            <a:endParaRPr lang="en-US" sz="1400"/>
           </a:p>
         </p:txBody>
       </p:sp>
@@ -7256,14 +7227,14 @@
               <a:buNone/>
             </a:pPr>
             <a:r>
-              <a:rPr lang="en-US" sz="1100" dirty="0">
+              <a:rPr lang="en-US" sz="1100">
                 <a:solidFill>
                   <a:srgbClr val="64748B"/>
                 </a:solidFill>
               </a:rPr>
               <a:t>8,420 products</a:t>
             </a:r>
-            <a:endParaRPr lang="en-US" sz="1100" dirty="0"/>
+            <a:endParaRPr lang="en-US" sz="1100"/>
           </a:p>
         </p:txBody>
       </p:sp>
@@ -7363,14 +7334,14 @@
               <a:buNone/>
             </a:pPr>
             <a:r>
-              <a:rPr lang="en-US" sz="1600" b="1" dirty="0">
+              <a:rPr lang="en-US" sz="1600" b="1">
                 <a:solidFill>
                   <a:srgbClr val="FFFFFF"/>
                 </a:solidFill>
               </a:rPr>
               <a:t>2</a:t>
             </a:r>
-            <a:endParaRPr lang="en-US" sz="1600" dirty="0"/>
+            <a:endParaRPr lang="en-US" sz="1600"/>
           </a:p>
         </p:txBody>
       </p:sp>
@@ -7399,14 +7370,14 @@
               <a:buNone/>
             </a:pPr>
             <a:r>
-              <a:rPr lang="en-US" sz="1400" b="1" dirty="0">
+              <a:rPr lang="en-US" sz="1400" b="1">
                 <a:solidFill>
                   <a:srgbClr val="1D9E75"/>
                 </a:solidFill>
               </a:rPr>
               <a:t>Peanut</a:t>
             </a:r>
-            <a:endParaRPr lang="en-US" sz="1400" dirty="0"/>
+            <a:endParaRPr lang="en-US" sz="1400"/>
           </a:p>
         </p:txBody>
       </p:sp>
@@ -7435,14 +7406,14 @@
               <a:buNone/>
             </a:pPr>
             <a:r>
-              <a:rPr lang="en-US" sz="1100" dirty="0">
+              <a:rPr lang="en-US" sz="1100">
                 <a:solidFill>
                   <a:srgbClr val="64748B"/>
                 </a:solidFill>
               </a:rPr>
               <a:t>7,010 products</a:t>
             </a:r>
-            <a:endParaRPr lang="en-US" sz="1100" dirty="0"/>
+            <a:endParaRPr lang="en-US" sz="1100"/>
           </a:p>
         </p:txBody>
       </p:sp>
@@ -7542,14 +7513,14 @@
               <a:buNone/>
             </a:pPr>
             <a:r>
-              <a:rPr lang="en-US" sz="1600" b="1" dirty="0">
+              <a:rPr lang="en-US" sz="1600" b="1">
                 <a:solidFill>
                   <a:srgbClr val="FFFFFF"/>
                 </a:solidFill>
               </a:rPr>
               <a:t>3</a:t>
             </a:r>
-            <a:endParaRPr lang="en-US" sz="1600" dirty="0"/>
+            <a:endParaRPr lang="en-US" sz="1600"/>
           </a:p>
         </p:txBody>
       </p:sp>
@@ -7578,14 +7549,14 @@
               <a:buNone/>
             </a:pPr>
             <a:r>
-              <a:rPr lang="en-US" sz="1400" b="1" dirty="0">
+              <a:rPr lang="en-US" sz="1400" b="1">
                 <a:solidFill>
                   <a:srgbClr val="2A9D8F"/>
                 </a:solidFill>
               </a:rPr>
               <a:t>Oat</a:t>
             </a:r>
-            <a:endParaRPr lang="en-US" sz="1400" dirty="0"/>
+            <a:endParaRPr lang="en-US" sz="1400"/>
           </a:p>
         </p:txBody>
       </p:sp>
@@ -7614,14 +7585,14 @@
               <a:buNone/>
             </a:pPr>
             <a:r>
-              <a:rPr lang="en-US" sz="1100" dirty="0">
+              <a:rPr lang="en-US" sz="1100">
                 <a:solidFill>
                   <a:srgbClr val="64748B"/>
                 </a:solidFill>
               </a:rPr>
               <a:t>5,940 products</a:t>
             </a:r>
-            <a:endParaRPr lang="en-US" sz="1100" dirty="0"/>
+            <a:endParaRPr lang="en-US" sz="1100"/>
           </a:p>
         </p:txBody>
       </p:sp>
@@ -7682,28 +7653,28 @@
               <a:buNone/>
             </a:pPr>
             <a:r>
-              <a:rPr lang="en-US" sz="1100" b="1" dirty="0">
+              <a:rPr lang="en-US" sz="1100" b="1">
                 <a:solidFill>
                   <a:srgbClr val="27500A"/>
                 </a:solidFill>
               </a:rPr>
               <a:t>Use soy , Peanut, or Soat as</a:t>
             </a:r>
-            <a:endParaRPr lang="en-US" sz="1100" dirty="0"/>
+            <a:endParaRPr lang="en-US" sz="1100"/>
           </a:p>
           <a:p>
             <a:pPr marL="0" indent="0">
               <a:buNone/>
             </a:pPr>
             <a:r>
-              <a:rPr lang="en-US" sz="1100" b="1" dirty="0">
+              <a:rPr lang="en-US" sz="1100" b="1">
                 <a:solidFill>
                   <a:srgbClr val="27500A"/>
                 </a:solidFill>
               </a:rPr>
               <a:t>primary protein sources in new products</a:t>
             </a:r>
-            <a:endParaRPr lang="en-US" sz="1100" dirty="0"/>
+            <a:endParaRPr lang="en-US" sz="1100"/>
           </a:p>
         </p:txBody>
       </p:sp>
@@ -7827,7 +7798,7 @@
               <a:buNone/>
             </a:pPr>
             <a:r>
-              <a:rPr lang="en-US" sz="2600" b="1" dirty="0">
+              <a:rPr lang="en-US" sz="2600" b="1">
                 <a:solidFill>
                   <a:srgbClr val="FFFFFF"/>
                 </a:solidFill>
@@ -7837,7 +7808,7 @@
               </a:rPr>
               <a:t>Story 6 : Candidate's Choice: Triple Opportunity</a:t>
             </a:r>
-            <a:endParaRPr lang="en-US" sz="2600" dirty="0"/>
+            <a:endParaRPr lang="en-US" sz="2600"/>
           </a:p>
         </p:txBody>
       </p:sp>
@@ -7866,14 +7837,14 @@
               <a:buNone/>
             </a:pPr>
             <a:r>
-              <a:rPr lang="en-US" sz="1300" dirty="0">
+              <a:rPr lang="en-US" sz="1300">
                 <a:solidFill>
                   <a:srgbClr val="64748B"/>
                 </a:solidFill>
               </a:rPr>
               <a:t>What I Added: Triple Opportunity Index -High Protein + High Fiber + Low Sugar</a:t>
             </a:r>
-            <a:endParaRPr lang="en-US" sz="1300" dirty="0"/>
+            <a:endParaRPr lang="en-US" sz="1300"/>
           </a:p>
         </p:txBody>
       </p:sp>
@@ -7918,14 +7889,14 @@
               <a:buNone/>
             </a:pPr>
             <a:r>
-              <a:rPr lang="en-US" sz="1200" b="1" dirty="0">
+              <a:rPr lang="en-US" sz="1200" b="1">
                 <a:solidFill>
                   <a:srgbClr val="1F3864"/>
                 </a:solidFill>
               </a:rPr>
               <a:t>WHY I ADDED THIS</a:t>
             </a:r>
-            <a:endParaRPr lang="en-US" sz="1200" dirty="0"/>
+            <a:endParaRPr lang="en-US" sz="1200"/>
           </a:p>
         </p:txBody>
       </p:sp>
@@ -7986,7 +7957,7 @@
               <a:buNone/>
             </a:pPr>
             <a:r>
-              <a:rPr lang="en-US" sz="1100" b="1" dirty="0">
+              <a:rPr lang="en-US" sz="1100" b="1">
                 <a:solidFill>
                   <a:srgbClr val="185FA5"/>
                 </a:solidFill>
@@ -7997,7 +7968,7 @@
               <a:t>1.  </a:t>
             </a:r>
             <a:r>
-              <a:rPr lang="en-US" sz="1100" dirty="0">
+              <a:rPr lang="en-US" sz="1100">
                 <a:solidFill>
                   <a:srgbClr val="1E293B"/>
                 </a:solidFill>
@@ -8007,7 +7978,7 @@
               </a:rPr>
               <a:t>The brief mentions High Protein AND High Fiber ,but Stories 3 &amp; 4 only measure sugar vs protein</a:t>
             </a:r>
-            <a:endParaRPr lang="en-US" sz="1100" dirty="0"/>
+            <a:endParaRPr lang="en-US" sz="1100"/>
           </a:p>
         </p:txBody>
       </p:sp>
@@ -8036,7 +8007,7 @@
               <a:buNone/>
             </a:pPr>
             <a:r>
-              <a:rPr lang="en-US" sz="1100" b="1" dirty="0">
+              <a:rPr lang="en-US" sz="1100" b="1">
                 <a:solidFill>
                   <a:srgbClr val="185FA5"/>
                 </a:solidFill>
@@ -8047,7 +8018,7 @@
               <a:t>2.  </a:t>
             </a:r>
             <a:r>
-              <a:rPr lang="en-US" sz="1100" dirty="0">
+              <a:rPr lang="en-US" sz="1100">
                 <a:solidFill>
                   <a:srgbClr val="1E293B"/>
                 </a:solidFill>
@@ -8057,7 +8028,7 @@
               </a:rPr>
               <a:t>A triple-claim product commands a premium price point</a:t>
             </a:r>
-            <a:endParaRPr lang="en-US" sz="1100" dirty="0"/>
+            <a:endParaRPr lang="en-US" sz="1100"/>
           </a:p>
         </p:txBody>
       </p:sp>
@@ -8086,7 +8057,7 @@
               <a:buNone/>
             </a:pPr>
             <a:r>
-              <a:rPr lang="en-US" sz="1100" b="1" dirty="0">
+              <a:rPr lang="en-US" sz="1100" b="1">
                 <a:solidFill>
                   <a:srgbClr val="185FA5"/>
                 </a:solidFill>
@@ -8097,7 +8068,7 @@
               <a:t>3.  </a:t>
             </a:r>
             <a:r>
-              <a:rPr lang="en-US" sz="1100" dirty="0">
+              <a:rPr lang="en-US" sz="1100">
                 <a:solidFill>
                   <a:srgbClr val="1E293B"/>
                 </a:solidFill>
@@ -8107,7 +8078,7 @@
               </a:rPr>
               <a:t>Meets EU criteria for both high protein AND high fiber front-of-pack claims</a:t>
             </a:r>
-            <a:endParaRPr lang="en-US" sz="1100" dirty="0"/>
+            <a:endParaRPr lang="en-US" sz="1100"/>
           </a:p>
         </p:txBody>
       </p:sp>
@@ -8136,7 +8107,7 @@
               <a:buNone/>
             </a:pPr>
             <a:r>
-              <a:rPr lang="en-US" sz="1100" b="1" dirty="0">
+              <a:rPr lang="en-US" sz="1100" b="1">
                 <a:solidFill>
                   <a:srgbClr val="185FA5"/>
                 </a:solidFill>
@@ -8147,7 +8118,7 @@
               <a:t>4.  </a:t>
             </a:r>
             <a:r>
-              <a:rPr lang="en-US" sz="1100" dirty="0">
+              <a:rPr lang="en-US" sz="1100">
                 <a:solidFill>
                   <a:srgbClr val="1E293B"/>
                 </a:solidFill>
@@ -8157,7 +8128,7 @@
               </a:rPr>
               <a:t>Reveals an even rarer market position  harder for competitors to copy</a:t>
             </a:r>
-            <a:endParaRPr lang="en-US" sz="1100" dirty="0"/>
+            <a:endParaRPr lang="en-US" sz="1100"/>
           </a:p>
         </p:txBody>
       </p:sp>
@@ -8218,14 +8189,14 @@
               <a:buNone/>
             </a:pPr>
             <a:r>
-              <a:rPr lang="en-US" sz="1000" b="1" dirty="0">
+              <a:rPr lang="en-US" sz="1000" b="1">
                 <a:solidFill>
                   <a:srgbClr val="27500A"/>
                 </a:solidFill>
               </a:rPr>
               <a:t>Criteria: &gt;= 15g protein | &lt;= 10g sugar | &gt;= 5g fiber</a:t>
             </a:r>
-            <a:endParaRPr lang="en-US" sz="1000" dirty="0"/>
+            <a:endParaRPr lang="en-US" sz="1000"/>
           </a:p>
         </p:txBody>
       </p:sp>
@@ -8319,7 +8290,7 @@
               <a:buNone/>
             </a:pPr>
             <a:r>
-              <a:rPr lang="en-US" sz="3200" b="1" dirty="0">
+              <a:rPr lang="en-US" sz="3200" b="1">
                 <a:solidFill>
                   <a:srgbClr val="FFFFFF"/>
                 </a:solidFill>
@@ -8329,7 +8300,7 @@
               </a:rPr>
               <a:t>Our Recommendation</a:t>
             </a:r>
-            <a:endParaRPr lang="en-US" sz="3200" dirty="0"/>
+            <a:endParaRPr lang="en-US" sz="3200"/>
           </a:p>
         </p:txBody>
       </p:sp>
@@ -8390,7 +8361,7 @@
               <a:buNone/>
             </a:pPr>
             <a:r>
-              <a:rPr lang="en-US" sz="1500" dirty="0">
+              <a:rPr lang="en-US" sz="1500">
                 <a:solidFill>
                   <a:srgbClr val="FFFFFF"/>
                 </a:solidFill>
@@ -8401,7 +8372,7 @@
               <a:t>Based on the data, the biggest market opportunity is in </a:t>
             </a:r>
             <a:r>
-              <a:rPr lang="en-US" sz="1500" b="1" dirty="0">
+              <a:rPr lang="en-US" sz="1500" b="1">
                 <a:solidFill>
                   <a:srgbClr val="E9C46A"/>
                 </a:solidFill>
@@ -8412,7 +8383,7 @@
               <a:t>Ice Cream &amp; Frozen Snacks, Fruit Snacks, and Popcorn</a:t>
             </a:r>
             <a:r>
-              <a:rPr lang="en-US" sz="1500" dirty="0">
+              <a:rPr lang="en-US" sz="1500">
                 <a:solidFill>
                   <a:srgbClr val="FFFFFF"/>
                 </a:solidFill>
@@ -8423,7 +8394,7 @@
               <a:t> ,specifically targeting products with </a:t>
             </a:r>
             <a:r>
-              <a:rPr lang="en-US" sz="1500" b="1" dirty="0">
+              <a:rPr lang="en-US" sz="1500" b="1">
                 <a:solidFill>
                   <a:srgbClr val="E9C46A"/>
                 </a:solidFill>
@@ -8434,7 +8405,7 @@
               <a:t>&gt;= 15g of protein</a:t>
             </a:r>
             <a:r>
-              <a:rPr lang="en-US" sz="1500" dirty="0">
+              <a:rPr lang="en-US" sz="1500">
                 <a:solidFill>
                   <a:srgbClr val="FFFFFF"/>
                 </a:solidFill>
@@ -8445,7 +8416,7 @@
               <a:t> and less than </a:t>
             </a:r>
             <a:r>
-              <a:rPr lang="en-US" sz="1500" b="1" dirty="0">
+              <a:rPr lang="en-US" sz="1500" b="1">
                 <a:solidFill>
                   <a:srgbClr val="E9C46A"/>
                 </a:solidFill>
@@ -8456,7 +8427,7 @@
               <a:t>8g of sugar</a:t>
             </a:r>
             <a:r>
-              <a:rPr lang="en-US" sz="1500" dirty="0">
+              <a:rPr lang="en-US" sz="1500">
                 <a:solidFill>
                   <a:srgbClr val="FFFFFF"/>
                 </a:solidFill>
@@ -8466,7 +8437,7 @@
               </a:rPr>
               <a:t> per 100g.</a:t>
             </a:r>
-            <a:endParaRPr lang="en-US" sz="1500" dirty="0"/>
+            <a:endParaRPr lang="en-US" sz="1500"/>
           </a:p>
         </p:txBody>
       </p:sp>
@@ -8559,14 +8530,14 @@
               <a:buNone/>
             </a:pPr>
             <a:r>
-              <a:rPr lang="en-US" sz="1400" b="1" dirty="0">
+              <a:rPr lang="en-US" sz="1400" b="1">
                 <a:solidFill>
                   <a:srgbClr val="E9C46A"/>
                 </a:solidFill>
               </a:rPr>
               <a:t>71.4%</a:t>
             </a:r>
-            <a:endParaRPr lang="en-US" sz="1400" dirty="0"/>
+            <a:endParaRPr lang="en-US" sz="1400"/>
           </a:p>
         </p:txBody>
       </p:sp>
@@ -8595,7 +8566,7 @@
               <a:buNone/>
             </a:pPr>
             <a:r>
-              <a:rPr lang="en-US" sz="1300" dirty="0">
+              <a:rPr lang="en-US" sz="1300">
                 <a:solidFill>
                   <a:srgbClr val="FFFFFF"/>
                 </a:solidFill>
@@ -8605,7 +8576,7 @@
               </a:rPr>
               <a:t>of snacks are in the Danger Zone - oversaturated market</a:t>
             </a:r>
-            <a:endParaRPr lang="en-US" sz="1300" dirty="0"/>
+            <a:endParaRPr lang="en-US" sz="1300"/>
           </a:p>
         </p:txBody>
       </p:sp>
@@ -8698,14 +8669,14 @@
               <a:buNone/>
             </a:pPr>
             <a:r>
-              <a:rPr lang="en-US" sz="1400" b="1" dirty="0">
+              <a:rPr lang="en-US" sz="1400" b="1">
                 <a:solidFill>
                   <a:srgbClr val="E9C46A"/>
                 </a:solidFill>
               </a:rPr>
               <a:t>4.2%</a:t>
             </a:r>
-            <a:endParaRPr lang="en-US" sz="1400" dirty="0"/>
+            <a:endParaRPr lang="en-US" sz="1400"/>
           </a:p>
         </p:txBody>
       </p:sp>
@@ -8734,7 +8705,7 @@
               <a:buNone/>
             </a:pPr>
             <a:r>
-              <a:rPr lang="en-US" sz="1300" dirty="0">
+              <a:rPr lang="en-US" sz="1300">
                 <a:solidFill>
                   <a:srgbClr val="FFFFFF"/>
                 </a:solidFill>
@@ -8744,7 +8715,7 @@
               </a:rPr>
               <a:t>of products occupy the healthy quadrant -Blue Ocean confirmed</a:t>
             </a:r>
-            <a:endParaRPr lang="en-US" sz="1300" dirty="0"/>
+            <a:endParaRPr lang="en-US" sz="1300"/>
           </a:p>
         </p:txBody>
       </p:sp>
@@ -8837,14 +8808,14 @@
               <a:buNone/>
             </a:pPr>
             <a:r>
-              <a:rPr lang="en-US" sz="1400" b="1" dirty="0">
+              <a:rPr lang="en-US" sz="1400" b="1">
                 <a:solidFill>
                   <a:srgbClr val="E9C46A"/>
                 </a:solidFill>
               </a:rPr>
               <a:t>0%</a:t>
             </a:r>
-            <a:endParaRPr lang="en-US" sz="1400" dirty="0"/>
+            <a:endParaRPr lang="en-US" sz="1400"/>
           </a:p>
         </p:txBody>
       </p:sp>
@@ -8873,7 +8844,7 @@
               <a:buNone/>
             </a:pPr>
             <a:r>
-              <a:rPr lang="en-US" sz="1300" dirty="0">
+              <a:rPr lang="en-US" sz="1300">
                 <a:solidFill>
                   <a:srgbClr val="FFFFFF"/>
                 </a:solidFill>
@@ -8883,7 +8854,7 @@
               </a:rPr>
               <a:t>of Ice Cream, Fruit Snacks, Popcorn products meet healthy criteria</a:t>
             </a:r>
-            <a:endParaRPr lang="en-US" sz="1300" dirty="0"/>
+            <a:endParaRPr lang="en-US" sz="1300"/>
           </a:p>
         </p:txBody>
       </p:sp>
@@ -8976,14 +8947,14 @@
               <a:buNone/>
             </a:pPr>
             <a:r>
-              <a:rPr lang="en-US" sz="1400" b="1" dirty="0">
+              <a:rPr lang="en-US" sz="1400" b="1">
                 <a:solidFill>
                   <a:srgbClr val="E9C46A"/>
                 </a:solidFill>
               </a:rPr>
               <a:t>Soy</a:t>
             </a:r>
-            <a:endParaRPr lang="en-US" sz="1400" dirty="0"/>
+            <a:endParaRPr lang="en-US" sz="1400"/>
           </a:p>
         </p:txBody>
       </p:sp>
@@ -9012,7 +8983,7 @@
               <a:buNone/>
             </a:pPr>
             <a:r>
-              <a:rPr lang="en-US" sz="1300" dirty="0">
+              <a:rPr lang="en-US" sz="1300">
                 <a:solidFill>
                   <a:srgbClr val="FFFFFF"/>
                 </a:solidFill>
@@ -9022,7 +8993,7 @@
               </a:rPr>
               <a:t>Peanut, Oat, top 3 protein sources for R&amp;D formulation</a:t>
             </a:r>
-            <a:endParaRPr lang="en-US" sz="1300" dirty="0"/>
+            <a:endParaRPr lang="en-US" sz="1300"/>
           </a:p>
         </p:txBody>
       </p:sp>
@@ -9646,6 +9617,6 @@
 
 <file path=docMetadata/LabelInfo.xml><?xml version="1.0" encoding="utf-8"?>
 <clbl:labelList xmlns:clbl="http://schemas.microsoft.com/office/2020/mipLabelMetadata">
-  <clbl:label id="{2f70ad68-4eca-4ffe-ad9d-60bfae449e23}" enabled="1" method="Standard" siteId="{b20a8f4d-0d6a-4f2e-83a2-181c968f8882}" contentBits="0" removed="0"/>
+  <clbl:label id="{61bf98d2-bf92-4575-845a-27a8200a6ff2}" enabled="1" method="Privileged" siteId="{b20a8f4d-0d6a-4f2e-83a2-181c968f8882}" removed="0"/>
 </clbl:labelList>
 </file>
--- a/Sugar_Trap_Presentation.pptx
+++ b/Sugar_Trap_Presentation.pptx
@@ -113,6 +113,35 @@
     </a:lvl9pPr>
   </p:defaultTextStyle>
 </p:presentation>
+</file>
+
+<file path=ppt/changesInfos/changesInfo1.xml><?xml version="1.0" encoding="utf-8"?>
+<pc:chgInfo xmlns:a="http://schemas.openxmlformats.org/drawingml/2006/main" xmlns:r="http://schemas.openxmlformats.org/officeDocument/2006/relationships" xmlns:ac="http://schemas.microsoft.com/office/drawing/2013/main/command" xmlns:pc="http://schemas.microsoft.com/office/powerpoint/2013/main/command">
+  <pc:docChgLst>
+    <pc:chgData name="Angela Tenkorang" userId="a40b4ec4-8edb-4146-96fa-bcd28e8b0fac" providerId="ADAL" clId="{2E99353F-591A-498E-A5C3-B5ECD380E5CD}"/>
+    <pc:docChg chg="modSld">
+      <pc:chgData name="Angela Tenkorang" userId="a40b4ec4-8edb-4146-96fa-bcd28e8b0fac" providerId="ADAL" clId="{2E99353F-591A-498E-A5C3-B5ECD380E5CD}" dt="2026-04-27T11:43:43.246" v="2" actId="20577"/>
+      <pc:docMkLst>
+        <pc:docMk/>
+      </pc:docMkLst>
+      <pc:sldChg chg="modSp mod">
+        <pc:chgData name="Angela Tenkorang" userId="a40b4ec4-8edb-4146-96fa-bcd28e8b0fac" providerId="ADAL" clId="{2E99353F-591A-498E-A5C3-B5ECD380E5CD}" dt="2026-04-27T11:43:43.246" v="2" actId="20577"/>
+        <pc:sldMkLst>
+          <pc:docMk/>
+          <pc:sldMk cId="0" sldId="258"/>
+        </pc:sldMkLst>
+        <pc:spChg chg="mod">
+          <ac:chgData name="Angela Tenkorang" userId="a40b4ec4-8edb-4146-96fa-bcd28e8b0fac" providerId="ADAL" clId="{2E99353F-591A-498E-A5C3-B5ECD380E5CD}" dt="2026-04-27T11:43:43.246" v="2" actId="20577"/>
+          <ac:spMkLst>
+            <pc:docMk/>
+            <pc:sldMk cId="0" sldId="258"/>
+            <ac:spMk id="3" creationId="{00000000-0000-0000-0000-000000000000}"/>
+          </ac:spMkLst>
+        </pc:spChg>
+      </pc:sldChg>
+    </pc:docChg>
+  </pc:docChgLst>
+</pc:chgInfo>
 </file>
 
 <file path=ppt/charts/chart1.xml><?xml version="1.0" encoding="utf-8"?>
@@ -2545,7 +2574,7 @@
               <a:buNone/>
             </a:pPr>
             <a:r>
-              <a:rPr lang="en-US" sz="1200" b="1">
+              <a:rPr lang="en-US" sz="1200" b="1" dirty="0">
                 <a:solidFill>
                   <a:srgbClr val="A8C8E8"/>
                 </a:solidFill>
@@ -2556,7 +2585,7 @@
               <a:t>Client: </a:t>
             </a:r>
             <a:r>
-              <a:rPr lang="en-US" sz="1200">
+              <a:rPr lang="en-US" sz="1200" dirty="0">
                 <a:solidFill>
                   <a:srgbClr val="FFFFFF"/>
                 </a:solidFill>
@@ -2567,7 +2596,7 @@
               <a:t>Helix CPG Partners</a:t>
             </a:r>
             <a:r>
-              <a:rPr lang="en-US" sz="1200">
+              <a:rPr lang="en-US" sz="1200" dirty="0">
                 <a:solidFill>
                   <a:srgbClr val="4A6FA5"/>
                 </a:solidFill>
@@ -2578,7 +2607,7 @@
               <a:t>   |   </a:t>
             </a:r>
             <a:r>
-              <a:rPr lang="en-US" sz="1200" b="1">
+              <a:rPr lang="en-US" sz="1200" b="1" dirty="0">
                 <a:solidFill>
                   <a:srgbClr val="A8C8E8"/>
                 </a:solidFill>
@@ -2589,7 +2618,7 @@
               <a:t>Dataset: </a:t>
             </a:r>
             <a:r>
-              <a:rPr lang="en-US" sz="1200">
+              <a:rPr lang="en-US" sz="1200" dirty="0">
                 <a:solidFill>
                   <a:srgbClr val="FFFFFF"/>
                 </a:solidFill>
@@ -2600,7 +2629,7 @@
               <a:t>Open Food Facts</a:t>
             </a:r>
             <a:r>
-              <a:rPr lang="en-US" sz="1200">
+              <a:rPr lang="en-US" sz="1200" dirty="0">
                 <a:solidFill>
                   <a:srgbClr val="4A6FA5"/>
                 </a:solidFill>
@@ -2611,7 +2640,7 @@
               <a:t>   |   </a:t>
             </a:r>
             <a:r>
-              <a:rPr lang="en-US" sz="1200">
+              <a:rPr lang="en-US" sz="1200" dirty="0">
                 <a:solidFill>
                   <a:srgbClr val="FFFFFF"/>
                 </a:solidFill>
@@ -2619,9 +2648,20 @@
                 <a:ea typeface="Arial" pitchFamily="34" charset="-122"/>
                 <a:cs typeface="Arial" pitchFamily="34" charset="-120"/>
               </a:rPr>
-              <a:t>500,000 Products Analysed</a:t>
-            </a:r>
-            <a:endParaRPr lang="en-US" sz="1200"/>
+              <a:t>500,000 Products </a:t>
+            </a:r>
+            <a:r>
+              <a:rPr lang="en-US" sz="1200" dirty="0" err="1">
+                <a:solidFill>
+                  <a:srgbClr val="FFFFFF"/>
+                </a:solidFill>
+                <a:latin typeface="Arial" pitchFamily="34" charset="0"/>
+                <a:ea typeface="Arial" pitchFamily="34" charset="-122"/>
+                <a:cs typeface="Arial" pitchFamily="34" charset="-120"/>
+              </a:rPr>
+              <a:t>Analysed</a:t>
+            </a:r>
+            <a:endParaRPr lang="en-US" sz="1200" dirty="0"/>
           </a:p>
         </p:txBody>
       </p:sp>
@@ -3389,7 +3429,7 @@
               <a:buNone/>
             </a:pPr>
             <a:r>
-              <a:rPr lang="en-US" sz="2800" b="1">
+              <a:rPr lang="en-US" sz="2800" b="1" dirty="0">
                 <a:solidFill>
                   <a:srgbClr val="FFFFFF"/>
                 </a:solidFill>
@@ -3397,9 +3437,9 @@
                 <a:ea typeface="Arial" pitchFamily="34" charset="-122"/>
                 <a:cs typeface="Arial" pitchFamily="34" charset="-120"/>
               </a:rPr>
-              <a:t>Our Methodology — 5 Sprints</a:t>
-            </a:r>
-            <a:endParaRPr lang="en-US" sz="2800"/>
+              <a:t>Our Methodology -5 Sprints</a:t>
+            </a:r>
+            <a:endParaRPr lang="en-US" sz="2800" dirty="0"/>
           </a:p>
         </p:txBody>
       </p:sp>
